--- a/Level 3 Semester 1(5th Semester)/CCE 311 - Numerical Methods/10_Newton_Cotes_Integration,_trapezoidal,_and_simpsons_rule_Formulas.pptx
+++ b/Level 3 Semester 1(5th Semester)/CCE 311 - Numerical Methods/10_Newton_Cotes_Integration,_trapezoidal,_and_simpsons_rule_Formulas.pptx
@@ -268,7 +268,7 @@
             <a:fld id="{5096E9A6-40C8-433D-BFD5-F46EF137E353}" type="datetimeFigureOut">
               <a:rPr lang="en-US" smtClean="0"/>
               <a:pPr/>
-              <a:t>7/13/2025</a:t>
+              <a:t>10/12/2025</a:t>
             </a:fld>
             <a:endParaRPr lang="en-US"/>
           </a:p>
@@ -438,7 +438,7 @@
             <a:fld id="{5096E9A6-40C8-433D-BFD5-F46EF137E353}" type="datetimeFigureOut">
               <a:rPr lang="en-US" smtClean="0"/>
               <a:pPr/>
-              <a:t>7/13/2025</a:t>
+              <a:t>10/12/2025</a:t>
             </a:fld>
             <a:endParaRPr lang="en-US"/>
           </a:p>
@@ -618,7 +618,7 @@
             <a:fld id="{5096E9A6-40C8-433D-BFD5-F46EF137E353}" type="datetimeFigureOut">
               <a:rPr lang="en-US" smtClean="0"/>
               <a:pPr/>
-              <a:t>7/13/2025</a:t>
+              <a:t>10/12/2025</a:t>
             </a:fld>
             <a:endParaRPr lang="en-US"/>
           </a:p>
@@ -788,7 +788,7 @@
             <a:fld id="{5096E9A6-40C8-433D-BFD5-F46EF137E353}" type="datetimeFigureOut">
               <a:rPr lang="en-US" smtClean="0"/>
               <a:pPr/>
-              <a:t>7/13/2025</a:t>
+              <a:t>10/12/2025</a:t>
             </a:fld>
             <a:endParaRPr lang="en-US"/>
           </a:p>
@@ -1035,7 +1035,7 @@
             <a:fld id="{5096E9A6-40C8-433D-BFD5-F46EF137E353}" type="datetimeFigureOut">
               <a:rPr lang="en-US" smtClean="0"/>
               <a:pPr/>
-              <a:t>7/13/2025</a:t>
+              <a:t>10/12/2025</a:t>
             </a:fld>
             <a:endParaRPr lang="en-US"/>
           </a:p>
@@ -1266,7 +1266,7 @@
             <a:fld id="{5096E9A6-40C8-433D-BFD5-F46EF137E353}" type="datetimeFigureOut">
               <a:rPr lang="en-US" smtClean="0"/>
               <a:pPr/>
-              <a:t>7/13/2025</a:t>
+              <a:t>10/12/2025</a:t>
             </a:fld>
             <a:endParaRPr lang="en-US"/>
           </a:p>
@@ -1632,7 +1632,7 @@
             <a:fld id="{5096E9A6-40C8-433D-BFD5-F46EF137E353}" type="datetimeFigureOut">
               <a:rPr lang="en-US" smtClean="0"/>
               <a:pPr/>
-              <a:t>7/13/2025</a:t>
+              <a:t>10/12/2025</a:t>
             </a:fld>
             <a:endParaRPr lang="en-US"/>
           </a:p>
@@ -1751,7 +1751,7 @@
             <a:fld id="{5096E9A6-40C8-433D-BFD5-F46EF137E353}" type="datetimeFigureOut">
               <a:rPr lang="en-US" smtClean="0"/>
               <a:pPr/>
-              <a:t>7/13/2025</a:t>
+              <a:t>10/12/2025</a:t>
             </a:fld>
             <a:endParaRPr lang="en-US"/>
           </a:p>
@@ -1848,7 +1848,7 @@
             <a:fld id="{5096E9A6-40C8-433D-BFD5-F46EF137E353}" type="datetimeFigureOut">
               <a:rPr lang="en-US" smtClean="0"/>
               <a:pPr/>
-              <a:t>7/13/2025</a:t>
+              <a:t>10/12/2025</a:t>
             </a:fld>
             <a:endParaRPr lang="en-US"/>
           </a:p>
@@ -2125,7 +2125,7 @@
             <a:fld id="{5096E9A6-40C8-433D-BFD5-F46EF137E353}" type="datetimeFigureOut">
               <a:rPr lang="en-US" smtClean="0"/>
               <a:pPr/>
-              <a:t>7/13/2025</a:t>
+              <a:t>10/12/2025</a:t>
             </a:fld>
             <a:endParaRPr lang="en-US"/>
           </a:p>
@@ -2379,7 +2379,7 @@
             <a:fld id="{5096E9A6-40C8-433D-BFD5-F46EF137E353}" type="datetimeFigureOut">
               <a:rPr lang="en-US" smtClean="0"/>
               <a:pPr/>
-              <a:t>7/13/2025</a:t>
+              <a:t>10/12/2025</a:t>
             </a:fld>
             <a:endParaRPr lang="en-US"/>
           </a:p>
@@ -2592,7 +2592,7 @@
             <a:fld id="{5096E9A6-40C8-433D-BFD5-F46EF137E353}" type="datetimeFigureOut">
               <a:rPr lang="en-US" smtClean="0"/>
               <a:pPr/>
-              <a:t>7/13/2025</a:t>
+              <a:t>10/12/2025</a:t>
             </a:fld>
             <a:endParaRPr lang="en-US"/>
           </a:p>
@@ -3684,7 +3684,10 @@
           <a:bodyPr/>
           <a:lstStyle/>
           <a:p>
-            <a:endParaRPr lang="en-US"/>
+            <a:r>
+              <a:rPr lang="en-US" dirty="0"/>
+              <a:t>        </a:t>
+            </a:r>
           </a:p>
         </p:txBody>
       </p:sp>
@@ -4585,7 +4588,7 @@
         </p:blipFill>
         <p:spPr>
           <a:xfrm>
-            <a:off x="0" y="433219"/>
+            <a:off x="127832" y="495896"/>
             <a:ext cx="6263240" cy="6162479"/>
           </a:xfrm>
           <a:prstGeom prst="rect">

--- a/Level 3 Semester 1(5th Semester)/CCE 311 - Numerical Methods/10_Newton_Cotes_Integration,_trapezoidal,_and_simpsons_rule_Formulas.pptx
+++ b/Level 3 Semester 1(5th Semester)/CCE 311 - Numerical Methods/10_Newton_Cotes_Integration,_trapezoidal,_and_simpsons_rule_Formulas.pptx
@@ -268,7 +268,7 @@
             <a:fld id="{5096E9A6-40C8-433D-BFD5-F46EF137E353}" type="datetimeFigureOut">
               <a:rPr lang="en-US" smtClean="0"/>
               <a:pPr/>
-              <a:t>10/12/2025</a:t>
+              <a:t>10/15/2025</a:t>
             </a:fld>
             <a:endParaRPr lang="en-US"/>
           </a:p>
@@ -438,7 +438,7 @@
             <a:fld id="{5096E9A6-40C8-433D-BFD5-F46EF137E353}" type="datetimeFigureOut">
               <a:rPr lang="en-US" smtClean="0"/>
               <a:pPr/>
-              <a:t>10/12/2025</a:t>
+              <a:t>10/15/2025</a:t>
             </a:fld>
             <a:endParaRPr lang="en-US"/>
           </a:p>
@@ -618,7 +618,7 @@
             <a:fld id="{5096E9A6-40C8-433D-BFD5-F46EF137E353}" type="datetimeFigureOut">
               <a:rPr lang="en-US" smtClean="0"/>
               <a:pPr/>
-              <a:t>10/12/2025</a:t>
+              <a:t>10/15/2025</a:t>
             </a:fld>
             <a:endParaRPr lang="en-US"/>
           </a:p>
@@ -788,7 +788,7 @@
             <a:fld id="{5096E9A6-40C8-433D-BFD5-F46EF137E353}" type="datetimeFigureOut">
               <a:rPr lang="en-US" smtClean="0"/>
               <a:pPr/>
-              <a:t>10/12/2025</a:t>
+              <a:t>10/15/2025</a:t>
             </a:fld>
             <a:endParaRPr lang="en-US"/>
           </a:p>
@@ -1035,7 +1035,7 @@
             <a:fld id="{5096E9A6-40C8-433D-BFD5-F46EF137E353}" type="datetimeFigureOut">
               <a:rPr lang="en-US" smtClean="0"/>
               <a:pPr/>
-              <a:t>10/12/2025</a:t>
+              <a:t>10/15/2025</a:t>
             </a:fld>
             <a:endParaRPr lang="en-US"/>
           </a:p>
@@ -1266,7 +1266,7 @@
             <a:fld id="{5096E9A6-40C8-433D-BFD5-F46EF137E353}" type="datetimeFigureOut">
               <a:rPr lang="en-US" smtClean="0"/>
               <a:pPr/>
-              <a:t>10/12/2025</a:t>
+              <a:t>10/15/2025</a:t>
             </a:fld>
             <a:endParaRPr lang="en-US"/>
           </a:p>
@@ -1632,7 +1632,7 @@
             <a:fld id="{5096E9A6-40C8-433D-BFD5-F46EF137E353}" type="datetimeFigureOut">
               <a:rPr lang="en-US" smtClean="0"/>
               <a:pPr/>
-              <a:t>10/12/2025</a:t>
+              <a:t>10/15/2025</a:t>
             </a:fld>
             <a:endParaRPr lang="en-US"/>
           </a:p>
@@ -1751,7 +1751,7 @@
             <a:fld id="{5096E9A6-40C8-433D-BFD5-F46EF137E353}" type="datetimeFigureOut">
               <a:rPr lang="en-US" smtClean="0"/>
               <a:pPr/>
-              <a:t>10/12/2025</a:t>
+              <a:t>10/15/2025</a:t>
             </a:fld>
             <a:endParaRPr lang="en-US"/>
           </a:p>
@@ -1848,7 +1848,7 @@
             <a:fld id="{5096E9A6-40C8-433D-BFD5-F46EF137E353}" type="datetimeFigureOut">
               <a:rPr lang="en-US" smtClean="0"/>
               <a:pPr/>
-              <a:t>10/12/2025</a:t>
+              <a:t>10/15/2025</a:t>
             </a:fld>
             <a:endParaRPr lang="en-US"/>
           </a:p>
@@ -2125,7 +2125,7 @@
             <a:fld id="{5096E9A6-40C8-433D-BFD5-F46EF137E353}" type="datetimeFigureOut">
               <a:rPr lang="en-US" smtClean="0"/>
               <a:pPr/>
-              <a:t>10/12/2025</a:t>
+              <a:t>10/15/2025</a:t>
             </a:fld>
             <a:endParaRPr lang="en-US"/>
           </a:p>
@@ -2379,7 +2379,7 @@
             <a:fld id="{5096E9A6-40C8-433D-BFD5-F46EF137E353}" type="datetimeFigureOut">
               <a:rPr lang="en-US" smtClean="0"/>
               <a:pPr/>
-              <a:t>10/12/2025</a:t>
+              <a:t>10/15/2025</a:t>
             </a:fld>
             <a:endParaRPr lang="en-US"/>
           </a:p>
@@ -2592,7 +2592,7 @@
             <a:fld id="{5096E9A6-40C8-433D-BFD5-F46EF137E353}" type="datetimeFigureOut">
               <a:rPr lang="en-US" smtClean="0"/>
               <a:pPr/>
-              <a:t>10/12/2025</a:t>
+              <a:t>10/15/2025</a:t>
             </a:fld>
             <a:endParaRPr lang="en-US"/>
           </a:p>
@@ -3084,7 +3084,10 @@
           <a:bodyPr/>
           <a:lstStyle/>
           <a:p>
-            <a:endParaRPr lang="en-US" dirty="0"/>
+            <a:r>
+              <a:rPr lang="en-US" dirty="0"/>
+              <a:t>                                </a:t>
+            </a:r>
           </a:p>
         </p:txBody>
       </p:sp>
